--- a/assets/docs-image-source.pptx
+++ b/assets/docs-image-source.pptx
@@ -8,6 +8,7 @@
     <p:sldId id="256" r:id="rId2"/>
     <p:sldId id="257" r:id="rId3"/>
     <p:sldId id="258" r:id="rId4"/>
+    <p:sldId id="259" r:id="rId5"/>
   </p:sldIdLst>
   <p:sldSz cx="12192000" cy="6858000"/>
   <p:notesSz cx="6858000" cy="9144000"/>
@@ -106,6 +107,11 @@
       </a:defRPr>
     </a:lvl9pPr>
   </p:defaultTextStyle>
+  <p:extLst>
+    <p:ext uri="{EFAFB233-063F-42B5-8137-9DF3F51BA10A}">
+      <p15:sldGuideLst xmlns:p15="http://schemas.microsoft.com/office/powerpoint/2012/main"/>
+    </p:ext>
+  </p:extLst>
 </p:presentation>
 </file>
 
@@ -3627,14 +3633,15 @@
         </p:nvPicPr>
         <p:blipFill>
           <a:blip r:embed="rId2"/>
+          <a:srcRect b="5278"/>
           <a:stretch>
             <a:fillRect/>
           </a:stretch>
         </p:blipFill>
         <p:spPr>
           <a:xfrm>
-            <a:off x="609600" y="0"/>
-            <a:ext cx="10972800" cy="6858000"/>
+            <a:off x="303906" y="0"/>
+            <a:ext cx="11584188" cy="6858000"/>
           </a:xfrm>
           <a:prstGeom prst="rect">
             <a:avLst/>
@@ -3655,8 +3662,8 @@
         </p:nvSpPr>
         <p:spPr>
           <a:xfrm>
-            <a:off x="1816906" y="1351472"/>
-            <a:ext cx="2116739" cy="678612"/>
+            <a:off x="1409888" y="728275"/>
+            <a:ext cx="3612962" cy="402026"/>
           </a:xfrm>
           <a:prstGeom prst="borderCallout2">
             <a:avLst>
@@ -3664,8 +3671,8 @@
               <a:gd name="adj2" fmla="val -8333"/>
               <a:gd name="adj3" fmla="val 18750"/>
               <a:gd name="adj4" fmla="val -16667"/>
-              <a:gd name="adj5" fmla="val 147167"/>
-              <a:gd name="adj6" fmla="val -45816"/>
+              <a:gd name="adj5" fmla="val 440717"/>
+              <a:gd name="adj6" fmla="val -24609"/>
             </a:avLst>
           </a:prstGeom>
           <a:solidFill>
@@ -3716,8 +3723,8 @@
         </p:nvSpPr>
         <p:spPr>
           <a:xfrm>
-            <a:off x="2029887" y="2915728"/>
-            <a:ext cx="2116739" cy="678612"/>
+            <a:off x="1644579" y="1858576"/>
+            <a:ext cx="2234681" cy="402026"/>
           </a:xfrm>
           <a:prstGeom prst="borderCallout2">
             <a:avLst>
@@ -3725,8 +3732,8 @@
               <a:gd name="adj2" fmla="val -8333"/>
               <a:gd name="adj3" fmla="val 18750"/>
               <a:gd name="adj4" fmla="val -16667"/>
-              <a:gd name="adj5" fmla="val -16392"/>
-              <a:gd name="adj6" fmla="val -27885"/>
+              <a:gd name="adj5" fmla="val 154194"/>
+              <a:gd name="adj6" fmla="val -27601"/>
             </a:avLst>
           </a:prstGeom>
           <a:solidFill>
@@ -3765,7 +3772,7 @@
       </p:sp>
       <p:sp>
         <p:nvSpPr>
-          <p:cNvPr id="12" name="吹き出し: 折線 11">
+          <p:cNvPr id="12" name="吹き出し: 線 11">
             <a:extLst>
               <a:ext uri="{FF2B5EF4-FFF2-40B4-BE49-F238E27FC236}">
                 <a16:creationId xmlns:a16="http://schemas.microsoft.com/office/drawing/2014/main" id="{57104A7E-C31F-F25B-0F24-8406E3319190}"/>
@@ -3777,17 +3784,15 @@
         </p:nvSpPr>
         <p:spPr>
           <a:xfrm>
-            <a:off x="5359488" y="2915728"/>
-            <a:ext cx="3893780" cy="427008"/>
+            <a:off x="1927551" y="3292550"/>
+            <a:ext cx="4110736" cy="450800"/>
           </a:xfrm>
-          <a:prstGeom prst="borderCallout2">
+          <a:prstGeom prst="borderCallout1">
             <a:avLst>
-              <a:gd name="adj1" fmla="val 18750"/>
-              <a:gd name="adj2" fmla="val -8333"/>
-              <a:gd name="adj3" fmla="val 18750"/>
-              <a:gd name="adj4" fmla="val -16667"/>
-              <a:gd name="adj5" fmla="val 19972"/>
-              <a:gd name="adj6" fmla="val -26113"/>
+              <a:gd name="adj1" fmla="val 20159"/>
+              <a:gd name="adj2" fmla="val -455"/>
+              <a:gd name="adj3" fmla="val -42447"/>
+              <a:gd name="adj4" fmla="val -11146"/>
             </a:avLst>
           </a:prstGeom>
           <a:solidFill>
@@ -3860,10 +3865,10 @@
       </p:grpSpPr>
       <p:pic>
         <p:nvPicPr>
-          <p:cNvPr id="5" name="図 4" descr="The image displays a video editing software interface, featuring a selection of video segments with various durations, confidence levels, and transcripts, arranged in a timeline for audio editing and transcription.&#10;&#10;AI 生成コンテンツは誤りを含む可能性があります。">
-            <a:extLst>
-              <a:ext uri="{FF2B5EF4-FFF2-40B4-BE49-F238E27FC236}">
-                <a16:creationId xmlns:a16="http://schemas.microsoft.com/office/drawing/2014/main" id="{7F8275CF-9BB5-D9EB-B1D5-79D0CAA4A258}"/>
+          <p:cNvPr id="3" name="図 2" descr="The image displays a video editing software interface, featuring a selection of video segments with various durations, confidence levels, and transcripts, arranged in a timeline for audio editing and transcription.&#10;&#10;AI 生成コンテンツは誤りを含む可能性があります。">
+            <a:extLst>
+              <a:ext uri="{FF2B5EF4-FFF2-40B4-BE49-F238E27FC236}">
+                <a16:creationId xmlns:a16="http://schemas.microsoft.com/office/drawing/2014/main" id="{E6FD022F-A741-7B68-B280-9CD0B8BC4B82}"/>
               </a:ext>
             </a:extLst>
           </p:cNvPr>
@@ -3874,14 +3879,15 @@
         </p:nvPicPr>
         <p:blipFill>
           <a:blip r:embed="rId2"/>
+          <a:srcRect b="5278"/>
           <a:stretch>
             <a:fillRect/>
           </a:stretch>
         </p:blipFill>
         <p:spPr>
           <a:xfrm>
-            <a:off x="609600" y="0"/>
-            <a:ext cx="10972800" cy="6858000"/>
+            <a:off x="303906" y="0"/>
+            <a:ext cx="11584188" cy="6858000"/>
           </a:xfrm>
           <a:prstGeom prst="rect">
             <a:avLst/>
@@ -3902,7 +3908,7 @@
         </p:nvSpPr>
         <p:spPr>
           <a:xfrm>
-            <a:off x="5750746" y="4508739"/>
+            <a:off x="6023058" y="4838939"/>
             <a:ext cx="3174718" cy="678612"/>
           </a:xfrm>
           <a:prstGeom prst="borderCallout2">
@@ -3911,8 +3917,8 @@
               <a:gd name="adj2" fmla="val -8333"/>
               <a:gd name="adj3" fmla="val 18750"/>
               <a:gd name="adj4" fmla="val -16667"/>
-              <a:gd name="adj5" fmla="val -16392"/>
-              <a:gd name="adj6" fmla="val -27885"/>
+              <a:gd name="adj5" fmla="val -31364"/>
+              <a:gd name="adj6" fmla="val -26285"/>
             </a:avLst>
           </a:prstGeom>
           <a:solidFill>
@@ -3967,7 +3973,7 @@
         </p:nvSpPr>
         <p:spPr>
           <a:xfrm>
-            <a:off x="2179411" y="4508739"/>
+            <a:off x="1746495" y="4794728"/>
             <a:ext cx="2605374" cy="678612"/>
           </a:xfrm>
           <a:prstGeom prst="borderCallout2">
@@ -4028,7 +4034,7 @@
         </p:nvSpPr>
         <p:spPr>
           <a:xfrm>
-            <a:off x="7806709" y="3475008"/>
+            <a:off x="7768609" y="3678208"/>
             <a:ext cx="3344370" cy="678612"/>
           </a:xfrm>
           <a:prstGeom prst="borderCallout2">
@@ -4093,7 +4099,7 @@
         </p:nvSpPr>
         <p:spPr>
           <a:xfrm>
-            <a:off x="1664701" y="5500777"/>
+            <a:off x="1309101" y="5780177"/>
             <a:ext cx="2605374" cy="678612"/>
           </a:xfrm>
           <a:prstGeom prst="borderCallout2">
@@ -4472,6 +4478,117 @@
     <p:extLst>
       <p:ext uri="{BB962C8B-B14F-4D97-AF65-F5344CB8AC3E}">
         <p14:creationId xmlns:p14="http://schemas.microsoft.com/office/powerpoint/2010/main" val="1935467559"/>
+      </p:ext>
+    </p:extLst>
+  </p:cSld>
+  <p:clrMapOvr>
+    <a:masterClrMapping/>
+  </p:clrMapOvr>
+</p:sld>
+</file>
+
+<file path=ppt/slides/slide4.xml><?xml version="1.0" encoding="utf-8"?>
+<p:sld xmlns:a="http://schemas.openxmlformats.org/drawingml/2006/main" xmlns:r="http://schemas.openxmlformats.org/officeDocument/2006/relationships" xmlns:p="http://schemas.openxmlformats.org/presentationml/2006/main">
+  <p:cSld>
+    <p:spTree>
+      <p:nvGrpSpPr>
+        <p:cNvPr id="1" name=""/>
+        <p:cNvGrpSpPr/>
+        <p:nvPr/>
+      </p:nvGrpSpPr>
+      <p:grpSpPr>
+        <a:xfrm>
+          <a:off x="0" y="0"/>
+          <a:ext cx="0" cy="0"/>
+          <a:chOff x="0" y="0"/>
+          <a:chExt cx="0" cy="0"/>
+        </a:xfrm>
+      </p:grpSpPr>
+      <p:sp>
+        <p:nvSpPr>
+          <p:cNvPr id="2" name="タイトル 1">
+            <a:extLst>
+              <a:ext uri="{FF2B5EF4-FFF2-40B4-BE49-F238E27FC236}">
+                <a16:creationId xmlns:a16="http://schemas.microsoft.com/office/drawing/2014/main" id="{EAE23AAE-B7F8-B220-9437-2AEC289C8A53}"/>
+              </a:ext>
+            </a:extLst>
+          </p:cNvPr>
+          <p:cNvSpPr>
+            <a:spLocks noGrp="1"/>
+          </p:cNvSpPr>
+          <p:nvPr>
+            <p:ph type="title"/>
+          </p:nvPr>
+        </p:nvSpPr>
+        <p:spPr/>
+        <p:txBody>
+          <a:bodyPr/>
+          <a:lstStyle/>
+          <a:p>
+            <a:endParaRPr kumimoji="1" lang="ja-JP" altLang="en-US"/>
+          </a:p>
+        </p:txBody>
+      </p:sp>
+      <p:sp>
+        <p:nvSpPr>
+          <p:cNvPr id="3" name="コンテンツ プレースホルダー 2">
+            <a:extLst>
+              <a:ext uri="{FF2B5EF4-FFF2-40B4-BE49-F238E27FC236}">
+                <a16:creationId xmlns:a16="http://schemas.microsoft.com/office/drawing/2014/main" id="{EBA6ABFB-2BF9-CD4F-0EC5-343E1AF3E328}"/>
+              </a:ext>
+            </a:extLst>
+          </p:cNvPr>
+          <p:cNvSpPr>
+            <a:spLocks noGrp="1"/>
+          </p:cNvSpPr>
+          <p:nvPr>
+            <p:ph idx="1"/>
+          </p:nvPr>
+        </p:nvSpPr>
+        <p:spPr/>
+        <p:txBody>
+          <a:bodyPr/>
+          <a:lstStyle/>
+          <a:p>
+            <a:endParaRPr kumimoji="1" lang="ja-JP" altLang="en-US"/>
+          </a:p>
+        </p:txBody>
+      </p:sp>
+      <p:pic>
+        <p:nvPicPr>
+          <p:cNvPr id="7" name="図 6" descr="The image displays a video editing software interface, featuring a selection of video segments with various durations, confidence levels, and transcripts, arranged in a timeline for audio editing and transcription.&#10;&#10;AI 生成コンテンツは誤りを含む可能性があります。">
+            <a:extLst>
+              <a:ext uri="{FF2B5EF4-FFF2-40B4-BE49-F238E27FC236}">
+                <a16:creationId xmlns:a16="http://schemas.microsoft.com/office/drawing/2014/main" id="{1DE8941E-B84E-CB18-A675-F866F7804BEC}"/>
+              </a:ext>
+            </a:extLst>
+          </p:cNvPr>
+          <p:cNvPicPr>
+            <a:picLocks noChangeAspect="1"/>
+          </p:cNvPicPr>
+          <p:nvPr/>
+        </p:nvPicPr>
+        <p:blipFill>
+          <a:blip r:embed="rId2"/>
+          <a:srcRect b="5278"/>
+          <a:stretch>
+            <a:fillRect/>
+          </a:stretch>
+        </p:blipFill>
+        <p:spPr>
+          <a:xfrm>
+            <a:off x="303906" y="0"/>
+            <a:ext cx="11584188" cy="6858000"/>
+          </a:xfrm>
+          <a:prstGeom prst="rect">
+            <a:avLst/>
+          </a:prstGeom>
+        </p:spPr>
+      </p:pic>
+    </p:spTree>
+    <p:extLst>
+      <p:ext uri="{BB962C8B-B14F-4D97-AF65-F5344CB8AC3E}">
+        <p14:creationId xmlns:p14="http://schemas.microsoft.com/office/powerpoint/2010/main" val="2347541153"/>
       </p:ext>
     </p:extLst>
   </p:cSld>
